--- a/docs/report/submission/人工智能赛道-KOSX1-答辩PPT.pptx
+++ b/docs/report/submission/人工智能赛道-KOSX1-答辩PPT.pptx
@@ -3703,7 +3703,7 @@
                 <a:ea typeface="Microsoft YaHei"/>
                 <a:cs typeface="Microsoft YaHei"/>
               </a:rPr>
-              <a:t>系统架构：为什么选 LangChain 生态</a:t>
+              <a:t>系统架构与技术选型</a:t>
             </a:r>
           </a:p>
         </p:txBody>
@@ -4152,7 +4152,7 @@
                 <a:ea typeface="Microsoft YaHei"/>
                 <a:cs typeface="Microsoft YaHei"/>
               </a:rPr>
-              <a:t>银行业务步骤多、检查严 → 需要能编排、能暂停、能接着办的框架</a:t>
+              <a:t>转账流程 10 个节点，每个暂停点写检查点，断了从原位继续</a:t>
             </a:r>
           </a:p>
         </p:txBody>
@@ -8448,7 +8448,7 @@
         </p:nvSpPr>
         <p:spPr>
           <a:xfrm>
-            <a:off x="457200" y="1874520"/>
+            <a:off x="457200" y="2240280"/>
             <a:ext cx="2670048" cy="3108960"/>
           </a:xfrm>
           <a:prstGeom prst="roundRect">
@@ -8494,7 +8494,7 @@
         </p:nvSpPr>
         <p:spPr>
           <a:xfrm>
-            <a:off x="685800" y="2103120"/>
+            <a:off x="685800" y="2468880"/>
             <a:ext cx="2194560" cy="457200"/>
           </a:xfrm>
           <a:prstGeom prst="rect">
@@ -8535,8 +8535,8 @@
         </p:nvSpPr>
         <p:spPr>
           <a:xfrm>
-            <a:off x="685800" y="2788920"/>
-            <a:ext cx="2240280" cy="2103120"/>
+            <a:off x="640080" y="3154680"/>
+            <a:ext cx="2377440" cy="2103120"/>
           </a:xfrm>
           <a:prstGeom prst="rect">
             <a:avLst/>
@@ -8556,7 +8556,7 @@
               <a:buChar char="•"/>
             </a:pPr>
             <a:r>
-              <a:rPr sz="1500" b="0">
+              <a:rPr sz="1400" b="0">
                 <a:solidFill>
                   <a:srgbClr val="1F243D"/>
                 </a:solidFill>
@@ -8564,7 +8564,7 @@
                 <a:ea typeface="Microsoft YaHei"/>
                 <a:cs typeface="Microsoft YaHei"/>
               </a:rPr>
-              <a:t>03 理财、04 卡片管理</a:t>
+              <a:t>03 理财</a:t>
             </a:r>
           </a:p>
           <a:p>
@@ -8575,7 +8575,7 @@
               <a:buChar char="•"/>
             </a:pPr>
             <a:r>
-              <a:rPr sz="1500" b="0">
+              <a:rPr sz="1400" b="0">
                 <a:solidFill>
                   <a:srgbClr val="1F243D"/>
                 </a:solidFill>
@@ -8583,7 +8583,26 @@
                 <a:ea typeface="Microsoft YaHei"/>
                 <a:cs typeface="Microsoft YaHei"/>
               </a:rPr>
-              <a:t>转账里的定时转账、AA 收款</a:t>
+              <a:t>04 卡片管理</a:t>
+            </a:r>
+          </a:p>
+          <a:p>
+            <a:pPr algn="l" marL="201168" indent="-201168">
+              <a:spcAft>
+                <a:spcPts val="1200"/>
+              </a:spcAft>
+              <a:buChar char="•"/>
+            </a:pPr>
+            <a:r>
+              <a:rPr sz="1400" b="0">
+                <a:solidFill>
+                  <a:srgbClr val="1F243D"/>
+                </a:solidFill>
+                <a:latin typeface="Microsoft YaHei"/>
+                <a:ea typeface="Microsoft YaHei"/>
+                <a:cs typeface="Microsoft YaHei"/>
+              </a:rPr>
+              <a:t>定时转账、AA 收款</a:t>
             </a:r>
           </a:p>
         </p:txBody>
@@ -8596,7 +8615,7 @@
         </p:nvSpPr>
         <p:spPr>
           <a:xfrm>
-            <a:off x="3310128" y="1874520"/>
+            <a:off x="3310128" y="2240280"/>
             <a:ext cx="2670048" cy="3108960"/>
           </a:xfrm>
           <a:prstGeom prst="roundRect">
@@ -8642,7 +8661,7 @@
         </p:nvSpPr>
         <p:spPr>
           <a:xfrm>
-            <a:off x="3538728" y="2103120"/>
+            <a:off x="3538728" y="2468880"/>
             <a:ext cx="2194560" cy="457200"/>
           </a:xfrm>
           <a:prstGeom prst="rect">
@@ -8683,8 +8702,8 @@
         </p:nvSpPr>
         <p:spPr>
           <a:xfrm>
-            <a:off x="3538728" y="2788920"/>
-            <a:ext cx="2240280" cy="2103120"/>
+            <a:off x="3493008" y="3154680"/>
+            <a:ext cx="2377440" cy="2103120"/>
           </a:xfrm>
           <a:prstGeom prst="rect">
             <a:avLst/>
@@ -8704,7 +8723,7 @@
               <a:buChar char="•"/>
             </a:pPr>
             <a:r>
-              <a:rPr sz="1500" b="0">
+              <a:rPr sz="1400" b="0">
                 <a:solidFill>
                   <a:srgbClr val="1F243D"/>
                 </a:solidFill>
@@ -8712,7 +8731,7 @@
                 <a:ea typeface="Microsoft YaHei"/>
                 <a:cs typeface="Microsoft YaHei"/>
               </a:rPr>
-              <a:t>模拟银行，不是真实银行</a:t>
+              <a:t>银行为模拟银行</a:t>
             </a:r>
           </a:p>
           <a:p>
@@ -8723,7 +8742,7 @@
               <a:buChar char="•"/>
             </a:pPr>
             <a:r>
-              <a:rPr sz="1500" b="0">
+              <a:rPr sz="1400" b="0">
                 <a:solidFill>
                   <a:srgbClr val="1F243D"/>
                 </a:solidFill>
@@ -8731,7 +8750,7 @@
                 <a:ea typeface="Microsoft YaHei"/>
                 <a:cs typeface="Microsoft YaHei"/>
               </a:rPr>
-              <a:t>刷脸由管理员页模拟作答</a:t>
+              <a:t>刷脸为模拟作答</a:t>
             </a:r>
           </a:p>
           <a:p>
@@ -8742,7 +8761,7 @@
               <a:buChar char="•"/>
             </a:pPr>
             <a:r>
-              <a:rPr sz="1500" b="0">
+              <a:rPr sz="1400" b="0">
                 <a:solidFill>
                   <a:srgbClr val="1F243D"/>
                 </a:solidFill>
@@ -8750,7 +8769,7 @@
                 <a:ea typeface="Microsoft YaHei"/>
                 <a:cs typeface="Microsoft YaHei"/>
               </a:rPr>
-              <a:t>部分风险判断用预设演示数据</a:t>
+              <a:t>部分风险用预设数据</a:t>
             </a:r>
           </a:p>
         </p:txBody>
@@ -8763,7 +8782,7 @@
         </p:nvSpPr>
         <p:spPr>
           <a:xfrm>
-            <a:off x="6163056" y="1874520"/>
+            <a:off x="6163056" y="2240280"/>
             <a:ext cx="2670048" cy="3108960"/>
           </a:xfrm>
           <a:prstGeom prst="roundRect">
@@ -8809,7 +8828,7 @@
         </p:nvSpPr>
         <p:spPr>
           <a:xfrm>
-            <a:off x="6391656" y="2103120"/>
+            <a:off x="6391656" y="2468880"/>
             <a:ext cx="2194560" cy="457200"/>
           </a:xfrm>
           <a:prstGeom prst="rect">
@@ -8850,8 +8869,8 @@
         </p:nvSpPr>
         <p:spPr>
           <a:xfrm>
-            <a:off x="6391656" y="2788920"/>
-            <a:ext cx="2240280" cy="2103120"/>
+            <a:off x="6345936" y="3154680"/>
+            <a:ext cx="2377440" cy="2103120"/>
           </a:xfrm>
           <a:prstGeom prst="rect">
             <a:avLst/>
@@ -8871,7 +8890,7 @@
               <a:buChar char="•"/>
             </a:pPr>
             <a:r>
-              <a:rPr sz="1500" b="0">
+              <a:rPr sz="1400" b="0">
                 <a:solidFill>
                   <a:srgbClr val="1F243D"/>
                 </a:solidFill>
@@ -8890,7 +8909,7 @@
               <a:buChar char="•"/>
             </a:pPr>
             <a:r>
-              <a:rPr sz="1500" b="0">
+              <a:rPr sz="1400" b="0">
                 <a:solidFill>
                   <a:srgbClr val="1F243D"/>
                 </a:solidFill>
@@ -8898,7 +8917,26 @@
                 <a:ea typeface="Microsoft YaHei"/>
                 <a:cs typeface="Microsoft YaHei"/>
               </a:rPr>
-              <a:t>部分步骤要等 1—5 分钟</a:t>
+              <a:t>部分步骤需等待</a:t>
+            </a:r>
+          </a:p>
+          <a:p>
+            <a:pPr algn="l" marL="201168" indent="-201168">
+              <a:spcAft>
+                <a:spcPts val="1200"/>
+              </a:spcAft>
+              <a:buChar char="•"/>
+            </a:pPr>
+            <a:r>
+              <a:rPr sz="1400" b="0">
+                <a:solidFill>
+                  <a:srgbClr val="1F243D"/>
+                </a:solidFill>
+                <a:latin typeface="Microsoft YaHei"/>
+                <a:ea typeface="Microsoft YaHei"/>
+                <a:cs typeface="Microsoft YaHei"/>
+              </a:rPr>
+              <a:t>约 1 到 5 分钟</a:t>
             </a:r>
           </a:p>
         </p:txBody>
@@ -8911,7 +8949,7 @@
         </p:nvSpPr>
         <p:spPr>
           <a:xfrm>
-            <a:off x="9015984" y="1874520"/>
+            <a:off x="9015984" y="2240280"/>
             <a:ext cx="2670048" cy="3108960"/>
           </a:xfrm>
           <a:prstGeom prst="roundRect">
@@ -8957,7 +8995,7 @@
         </p:nvSpPr>
         <p:spPr>
           <a:xfrm>
-            <a:off x="9244584" y="2103120"/>
+            <a:off x="9244584" y="2468880"/>
             <a:ext cx="2194560" cy="457200"/>
           </a:xfrm>
           <a:prstGeom prst="rect">
@@ -8998,8 +9036,8 @@
         </p:nvSpPr>
         <p:spPr>
           <a:xfrm>
-            <a:off x="9244584" y="2788920"/>
-            <a:ext cx="2240280" cy="2103120"/>
+            <a:off x="9198864" y="3154680"/>
+            <a:ext cx="2377440" cy="2103120"/>
           </a:xfrm>
           <a:prstGeom prst="rect">
             <a:avLst/>
@@ -9019,7 +9057,7 @@
               <a:buChar char="•"/>
             </a:pPr>
             <a:r>
-              <a:rPr sz="1500" b="0">
+              <a:rPr sz="1400" b="0">
                 <a:solidFill>
                   <a:srgbClr val="1F243D"/>
                 </a:solidFill>
@@ -9038,7 +9076,7 @@
               <a:buChar char="•"/>
             </a:pPr>
             <a:r>
-              <a:rPr sz="1500" b="0">
+              <a:rPr sz="1400" b="0">
                 <a:solidFill>
                   <a:srgbClr val="1F243D"/>
                 </a:solidFill>
@@ -9057,7 +9095,7 @@
               <a:buChar char="•"/>
             </a:pPr>
             <a:r>
-              <a:rPr sz="1500" b="0">
+              <a:rPr sz="1400" b="0">
                 <a:solidFill>
                   <a:srgbClr val="1F243D"/>
                 </a:solidFill>
@@ -10623,7 +10661,7 @@
         </p:nvSpPr>
         <p:spPr>
           <a:xfrm>
-            <a:off x="548640" y="1600200"/>
+            <a:off x="548640" y="1828800"/>
             <a:ext cx="5120640" cy="2926080"/>
           </a:xfrm>
           <a:prstGeom prst="rect">
@@ -10706,7 +10744,7 @@
                 <a:ea typeface="Microsoft YaHei"/>
                 <a:cs typeface="Microsoft YaHei"/>
               </a:rPr>
-              <a:t>每一步做到哪里都看得见，动钱必须本人确认，结果只认银行</a:t>
+              <a:t>进度实时可见，动钱前本人确认</a:t>
             </a:r>
           </a:p>
         </p:txBody>
@@ -10719,7 +10757,7 @@
         </p:nvSpPr>
         <p:spPr>
           <a:xfrm>
-            <a:off x="548640" y="4572000"/>
+            <a:off x="548640" y="4389120"/>
             <a:ext cx="5120640" cy="365760"/>
           </a:xfrm>
           <a:prstGeom prst="rect">
@@ -10760,7 +10798,7 @@
         </p:nvSpPr>
         <p:spPr>
           <a:xfrm>
-            <a:off x="548640" y="4983480"/>
+            <a:off x="548640" y="4846320"/>
             <a:ext cx="2377440" cy="475488"/>
           </a:xfrm>
           <a:prstGeom prst="roundRect">
@@ -10806,7 +10844,7 @@
         </p:nvSpPr>
         <p:spPr>
           <a:xfrm>
-            <a:off x="548640" y="4983480"/>
+            <a:off x="548640" y="4846320"/>
             <a:ext cx="2377440" cy="475488"/>
           </a:xfrm>
           <a:prstGeom prst="rect">
@@ -10847,7 +10885,7 @@
         </p:nvSpPr>
         <p:spPr>
           <a:xfrm>
-            <a:off x="3108960" y="4983480"/>
+            <a:off x="3108960" y="4846320"/>
             <a:ext cx="2377440" cy="475488"/>
           </a:xfrm>
           <a:prstGeom prst="roundRect">
@@ -10893,7 +10931,7 @@
         </p:nvSpPr>
         <p:spPr>
           <a:xfrm>
-            <a:off x="3108960" y="4983480"/>
+            <a:off x="3108960" y="4846320"/>
             <a:ext cx="2377440" cy="475488"/>
           </a:xfrm>
           <a:prstGeom prst="rect">
@@ -10934,7 +10972,7 @@
         </p:nvSpPr>
         <p:spPr>
           <a:xfrm>
-            <a:off x="548640" y="5577840"/>
+            <a:off x="548640" y="5486400"/>
             <a:ext cx="2377440" cy="475488"/>
           </a:xfrm>
           <a:prstGeom prst="roundRect">
@@ -10980,7 +11018,7 @@
         </p:nvSpPr>
         <p:spPr>
           <a:xfrm>
-            <a:off x="548640" y="5577840"/>
+            <a:off x="548640" y="5486400"/>
             <a:ext cx="2377440" cy="475488"/>
           </a:xfrm>
           <a:prstGeom prst="rect">
@@ -11021,7 +11059,7 @@
         </p:nvSpPr>
         <p:spPr>
           <a:xfrm>
-            <a:off x="3108960" y="5577840"/>
+            <a:off x="3108960" y="5486400"/>
             <a:ext cx="2377440" cy="475488"/>
           </a:xfrm>
           <a:prstGeom prst="roundRect">
@@ -11067,7 +11105,7 @@
         </p:nvSpPr>
         <p:spPr>
           <a:xfrm>
-            <a:off x="3108960" y="5577840"/>
+            <a:off x="3108960" y="5486400"/>
             <a:ext cx="2377440" cy="475488"/>
           </a:xfrm>
           <a:prstGeom prst="rect">
@@ -11175,7 +11213,7 @@
         </p:blipFill>
         <p:spPr>
           <a:xfrm>
-            <a:off x="457200" y="1417320"/>
+            <a:off x="457200" y="1737360"/>
             <a:ext cx="7863840" cy="4423410"/>
           </a:xfrm>
           <a:prstGeom prst="rect">
@@ -11191,7 +11229,7 @@
         </p:nvSpPr>
         <p:spPr>
           <a:xfrm>
-            <a:off x="8641080" y="1508760"/>
+            <a:off x="8641080" y="2011680"/>
             <a:ext cx="3108960" cy="457200"/>
           </a:xfrm>
           <a:prstGeom prst="rect">
@@ -11232,7 +11270,7 @@
         </p:nvSpPr>
         <p:spPr>
           <a:xfrm>
-            <a:off x="8641080" y="2103120"/>
+            <a:off x="8641080" y="2697480"/>
             <a:ext cx="384048" cy="384048"/>
           </a:xfrm>
           <a:prstGeom prst="ellipse">
@@ -11287,7 +11325,7 @@
         </p:nvSpPr>
         <p:spPr>
           <a:xfrm>
-            <a:off x="9144000" y="2084832"/>
+            <a:off x="9144000" y="2679192"/>
             <a:ext cx="2651760" cy="365760"/>
           </a:xfrm>
           <a:prstGeom prst="rect">
@@ -11328,7 +11366,7 @@
         </p:nvSpPr>
         <p:spPr>
           <a:xfrm>
-            <a:off x="9144000" y="2487168"/>
+            <a:off x="9144000" y="3081528"/>
             <a:ext cx="2651760" cy="548640"/>
           </a:xfrm>
           <a:prstGeom prst="rect">
@@ -11369,7 +11407,7 @@
         </p:nvSpPr>
         <p:spPr>
           <a:xfrm>
-            <a:off x="8641080" y="3246120"/>
+            <a:off x="8641080" y="3840480"/>
             <a:ext cx="384048" cy="384048"/>
           </a:xfrm>
           <a:prstGeom prst="ellipse">
@@ -11424,7 +11462,7 @@
         </p:nvSpPr>
         <p:spPr>
           <a:xfrm>
-            <a:off x="9144000" y="3227832"/>
+            <a:off x="9144000" y="3822192"/>
             <a:ext cx="2651760" cy="365760"/>
           </a:xfrm>
           <a:prstGeom prst="rect">
@@ -11465,7 +11503,7 @@
         </p:nvSpPr>
         <p:spPr>
           <a:xfrm>
-            <a:off x="9144000" y="3630168"/>
+            <a:off x="9144000" y="4224528"/>
             <a:ext cx="2651760" cy="548640"/>
           </a:xfrm>
           <a:prstGeom prst="rect">
@@ -11506,7 +11544,7 @@
         </p:nvSpPr>
         <p:spPr>
           <a:xfrm>
-            <a:off x="8641080" y="4389120"/>
+            <a:off x="8641080" y="4983480"/>
             <a:ext cx="384048" cy="384048"/>
           </a:xfrm>
           <a:prstGeom prst="ellipse">
@@ -11561,7 +11599,7 @@
         </p:nvSpPr>
         <p:spPr>
           <a:xfrm>
-            <a:off x="9144000" y="4370832"/>
+            <a:off x="9144000" y="4965192"/>
             <a:ext cx="2651760" cy="365760"/>
           </a:xfrm>
           <a:prstGeom prst="rect">
@@ -11602,7 +11640,7 @@
         </p:nvSpPr>
         <p:spPr>
           <a:xfrm>
-            <a:off x="9144000" y="4773168"/>
+            <a:off x="9144000" y="5367528"/>
             <a:ext cx="2651760" cy="548640"/>
           </a:xfrm>
           <a:prstGeom prst="rect">
@@ -11631,47 +11669,6 @@
                 <a:cs typeface="Microsoft YaHei"/>
               </a:rPr>
               <a:t>余额、限额、风控以银行为准</a:t>
-            </a:r>
-          </a:p>
-        </p:txBody>
-      </p:sp>
-      <p:sp>
-        <p:nvSpPr>
-          <p:cNvPr id="14" name="TextBox 13"/>
-          <p:cNvSpPr txBox="1"/>
-          <p:nvPr/>
-        </p:nvSpPr>
-        <p:spPr>
-          <a:xfrm>
-            <a:off x="457200" y="5989320"/>
-            <a:ext cx="11247120" cy="457200"/>
-          </a:xfrm>
-          <a:prstGeom prst="rect">
-            <a:avLst/>
-          </a:prstGeom>
-          <a:noFill/>
-        </p:spPr>
-        <p:txBody>
-          <a:bodyPr wrap="square" anchor="t" lIns="0" rIns="0" tIns="0" bIns="0">
-            <a:spAutoFit/>
-          </a:bodyPr>
-          <a:lstStyle/>
-          <a:p>
-            <a:pPr algn="ctr">
-              <a:spcAft>
-                <a:spcPts val="600"/>
-              </a:spcAft>
-            </a:pPr>
-            <a:r>
-              <a:rPr sz="1800" b="1">
-                <a:solidFill>
-                  <a:srgbClr val="D82C6A"/>
-                </a:solidFill>
-                <a:latin typeface="Microsoft YaHei"/>
-                <a:ea typeface="Microsoft YaHei"/>
-                <a:cs typeface="Microsoft YaHei"/>
-              </a:rPr>
-              <a:t>在银行这种必须严格的场景里，AI Agent 到底能自由到什么程度？</a:t>
             </a:r>
           </a:p>
         </p:txBody>
